--- a/livrables/Lebayle_Kevin_7_présentation_13.04.26.v2.pptx
+++ b/livrables/Lebayle_Kevin_7_présentation_13.04.26.v2.pptx
@@ -6882,7 +6882,7 @@
           <a:p>
             <a:fld id="{96840CCF-3F16-4195-B220-68D51C178D9E}" type="datetimeFigureOut">
               <a:rPr lang="en-US" smtClean="0"/>
-              <a:t>4/24/2026</a:t>
+              <a:t>4/28/2026</a:t>
             </a:fld>
             <a:endParaRPr lang="en-US"/>
           </a:p>
@@ -7964,7 +7964,7 @@
           <a:p>
             <a:fld id="{4AAD347D-5ACD-4C99-B74B-A9C85AD731AF}" type="datetimeFigureOut">
               <a:rPr lang="en-US" smtClean="0"/>
-              <a:t>4/24/2026</a:t>
+              <a:t>4/28/2026</a:t>
             </a:fld>
             <a:endParaRPr lang="en-US" dirty="0"/>
           </a:p>
@@ -8215,7 +8215,7 @@
           <a:p>
             <a:fld id="{4AAD347D-5ACD-4C99-B74B-A9C85AD731AF}" type="datetimeFigureOut">
               <a:rPr lang="en-US" smtClean="0"/>
-              <a:t>4/24/2026</a:t>
+              <a:t>4/28/2026</a:t>
             </a:fld>
             <a:endParaRPr lang="en-US" dirty="0"/>
           </a:p>
@@ -8530,7 +8530,7 @@
           <a:p>
             <a:fld id="{4AAD347D-5ACD-4C99-B74B-A9C85AD731AF}" type="datetimeFigureOut">
               <a:rPr lang="en-US" smtClean="0"/>
-              <a:t>4/24/2026</a:t>
+              <a:t>4/28/2026</a:t>
             </a:fld>
             <a:endParaRPr lang="en-US" dirty="0"/>
           </a:p>
@@ -8872,7 +8872,7 @@
           <a:p>
             <a:fld id="{4AAD347D-5ACD-4C99-B74B-A9C85AD731AF}" type="datetimeFigureOut">
               <a:rPr lang="en-US" smtClean="0"/>
-              <a:t>4/24/2026</a:t>
+              <a:t>4/28/2026</a:t>
             </a:fld>
             <a:endParaRPr lang="en-US" dirty="0"/>
           </a:p>
@@ -9187,7 +9187,7 @@
           <a:p>
             <a:fld id="{4AAD347D-5ACD-4C99-B74B-A9C85AD731AF}" type="datetimeFigureOut">
               <a:rPr lang="en-US" smtClean="0"/>
-              <a:t>4/24/2026</a:t>
+              <a:t>4/28/2026</a:t>
             </a:fld>
             <a:endParaRPr lang="en-US" dirty="0"/>
           </a:p>
@@ -9581,7 +9581,7 @@
           <a:p>
             <a:fld id="{4AAD347D-5ACD-4C99-B74B-A9C85AD731AF}" type="datetimeFigureOut">
               <a:rPr lang="en-US" smtClean="0"/>
-              <a:t>4/24/2026</a:t>
+              <a:t>4/28/2026</a:t>
             </a:fld>
             <a:endParaRPr lang="en-US" dirty="0"/>
           </a:p>
@@ -9752,7 +9752,7 @@
           <a:p>
             <a:fld id="{4509A250-FF31-4206-8172-F9D3106AACB1}" type="datetimeFigureOut">
               <a:rPr lang="en-US" smtClean="0"/>
-              <a:t>4/24/2026</a:t>
+              <a:t>4/28/2026</a:t>
             </a:fld>
             <a:endParaRPr lang="en-US" dirty="0"/>
           </a:p>
@@ -9932,7 +9932,7 @@
           <a:p>
             <a:fld id="{4509A250-FF31-4206-8172-F9D3106AACB1}" type="datetimeFigureOut">
               <a:rPr lang="en-US" smtClean="0"/>
-              <a:t>4/24/2026</a:t>
+              <a:t>4/28/2026</a:t>
             </a:fld>
             <a:endParaRPr lang="en-US" dirty="0"/>
           </a:p>
@@ -10108,7 +10108,7 @@
           <a:p>
             <a:fld id="{4509A250-FF31-4206-8172-F9D3106AACB1}" type="datetimeFigureOut">
               <a:rPr lang="en-US" smtClean="0"/>
-              <a:t>4/24/2026</a:t>
+              <a:t>4/28/2026</a:t>
             </a:fld>
             <a:endParaRPr lang="en-US" dirty="0"/>
           </a:p>
@@ -10355,7 +10355,7 @@
           <a:p>
             <a:fld id="{9796027F-7875-4030-9381-8BD8C4F21935}" type="datetimeFigureOut">
               <a:rPr lang="en-US" smtClean="0"/>
-              <a:t>4/24/2026</a:t>
+              <a:t>4/28/2026</a:t>
             </a:fld>
             <a:endParaRPr lang="en-US" dirty="0"/>
           </a:p>
@@ -10587,7 +10587,7 @@
           <a:p>
             <a:fld id="{9796027F-7875-4030-9381-8BD8C4F21935}" type="datetimeFigureOut">
               <a:rPr lang="en-US" smtClean="0"/>
-              <a:t>4/24/2026</a:t>
+              <a:t>4/28/2026</a:t>
             </a:fld>
             <a:endParaRPr lang="en-US" dirty="0"/>
           </a:p>
@@ -10961,7 +10961,7 @@
           <a:p>
             <a:fld id="{9796027F-7875-4030-9381-8BD8C4F21935}" type="datetimeFigureOut">
               <a:rPr lang="en-US" smtClean="0"/>
-              <a:t>4/24/2026</a:t>
+              <a:t>4/28/2026</a:t>
             </a:fld>
             <a:endParaRPr lang="en-US" dirty="0"/>
           </a:p>
@@ -11084,7 +11084,7 @@
           <a:p>
             <a:fld id="{4509A250-FF31-4206-8172-F9D3106AACB1}" type="datetimeFigureOut">
               <a:rPr lang="en-US" smtClean="0"/>
-              <a:t>4/24/2026</a:t>
+              <a:t>4/28/2026</a:t>
             </a:fld>
             <a:endParaRPr lang="en-US" dirty="0"/>
           </a:p>
@@ -11179,7 +11179,7 @@
           <a:p>
             <a:fld id="{4509A250-FF31-4206-8172-F9D3106AACB1}" type="datetimeFigureOut">
               <a:rPr lang="en-US" smtClean="0"/>
-              <a:t>4/24/2026</a:t>
+              <a:t>4/28/2026</a:t>
             </a:fld>
             <a:endParaRPr lang="en-US" dirty="0"/>
           </a:p>
@@ -11434,7 +11434,7 @@
           <a:p>
             <a:fld id="{4509A250-FF31-4206-8172-F9D3106AACB1}" type="datetimeFigureOut">
               <a:rPr lang="en-US" smtClean="0"/>
-              <a:t>4/24/2026</a:t>
+              <a:t>4/28/2026</a:t>
             </a:fld>
             <a:endParaRPr lang="en-US" dirty="0"/>
           </a:p>
@@ -11697,7 +11697,7 @@
           <a:p>
             <a:fld id="{4509A250-FF31-4206-8172-F9D3106AACB1}" type="datetimeFigureOut">
               <a:rPr lang="en-US" smtClean="0"/>
-              <a:t>4/24/2026</a:t>
+              <a:t>4/28/2026</a:t>
             </a:fld>
             <a:endParaRPr lang="en-US" dirty="0"/>
           </a:p>
@@ -12440,7 +12440,7 @@
           <a:p>
             <a:fld id="{4AAD347D-5ACD-4C99-B74B-A9C85AD731AF}" type="datetimeFigureOut">
               <a:rPr lang="en-US" smtClean="0"/>
-              <a:t>4/24/2026</a:t>
+              <a:t>4/28/2026</a:t>
             </a:fld>
             <a:endParaRPr lang="en-US" dirty="0"/>
           </a:p>
@@ -15664,7 +15664,7 @@
             </a:br>
             <a:r>
               <a:rPr lang="fr-FR" dirty="0"/>
-              <a:t>Clustering – GMM EFNET B4</a:t>
+              <a:t>Clustering – GMM EFNET B4 (k=2)</a:t>
             </a:r>
             <a:endParaRPr lang="en-US" dirty="0"/>
           </a:p>
@@ -15721,7 +15721,7 @@
           <p:nvPr>
             <p:extLst>
               <p:ext uri="{D42A27DB-BD31-4B8C-83A1-F6EECF244321}">
-                <p14:modId xmlns:p14="http://schemas.microsoft.com/office/powerpoint/2010/main" val="420929089"/>
+                <p14:modId xmlns:p14="http://schemas.microsoft.com/office/powerpoint/2010/main" val="2643624579"/>
               </p:ext>
             </p:extLst>
           </p:nvPr>
@@ -15824,7 +15824,7 @@
                   </a:ext>
                 </a:extLst>
               </a:tr>
-              <a:tr h="236425">
+              <a:tr h="250969">
                 <a:tc>
                   <a:txBody>
                     <a:bodyPr/>
@@ -19531,7 +19531,7 @@
             </a:br>
             <a:r>
               <a:rPr lang="fr-FR" sz="4400" dirty="0"/>
-              <a:t>Non supervisé</a:t>
+              <a:t>Supervisé</a:t>
             </a:r>
             <a:endParaRPr lang="en-US" dirty="0"/>
           </a:p>
@@ -22124,7 +22124,7 @@
 </file>
 
 <file path=ppt/slides/slide24.xml><?xml version="1.0" encoding="utf-8"?>
-<p:sld xmlns:a="http://schemas.openxmlformats.org/drawingml/2006/main" xmlns:r="http://schemas.openxmlformats.org/officeDocument/2006/relationships" xmlns:p="http://schemas.openxmlformats.org/presentationml/2006/main">
+<p:sld xmlns:a="http://schemas.openxmlformats.org/drawingml/2006/main" xmlns:r="http://schemas.openxmlformats.org/officeDocument/2006/relationships" xmlns:p="http://schemas.openxmlformats.org/presentationml/2006/main" show="0">
   <p:cSld>
     <p:spTree>
       <p:nvGrpSpPr>
@@ -24742,7 +24742,7 @@
         </p:nvSpPr>
         <p:spPr>
           <a:xfrm>
-            <a:off x="1682663" y="4396245"/>
+            <a:off x="1175874" y="4853952"/>
             <a:ext cx="996035" cy="369332"/>
           </a:xfrm>
           <a:prstGeom prst="rect">
@@ -27152,6 +27152,14 @@
                 </a:solidFill>
               </a:rPr>
               <a:t>Recap</a:t>
+            </a:r>
+            <a:r>
+              <a:rPr lang="fr-FR" b="1" dirty="0">
+                <a:solidFill>
+                  <a:schemeClr val="tx1"/>
+                </a:solidFill>
+              </a:rPr>
+              <a:t> (VAL SET 30 IMAGES)</a:t>
             </a:r>
             <a:endParaRPr lang="en-US" dirty="0"/>
           </a:p>
@@ -30214,7 +30222,7 @@
                   <a:srgbClr val="FF0000"/>
                 </a:solidFill>
               </a:rPr>
-              <a:t>(2048,)</a:t>
+              <a:t>(1506,)</a:t>
             </a:r>
             <a:endParaRPr lang="en-US" sz="1400" dirty="0">
               <a:solidFill>
@@ -30258,7 +30266,7 @@
                   <a:srgbClr val="FF0000"/>
                 </a:solidFill>
               </a:rPr>
-              <a:t>(658,)</a:t>
+              <a:t>(379,)</a:t>
             </a:r>
             <a:endParaRPr lang="en-US" sz="1400" dirty="0">
               <a:solidFill>
